--- a/curso_es/pptx/S04.pptx
+++ b/curso_es/pptx/S04.pptx
@@ -3801,7 +3801,7 @@
                 </a:solidFill>
                 <a:latin typeface="Nunito Sans"/>
               </a:rPr>
-              <a:t>Dylan dice: «El profe de Música se va del instituto».</a:t>
+              <a:t>Un chico dice: «El entrenador se va del equipo».</a:t>
             </a:r>
           </a:p>
         </p:txBody>
@@ -3849,7 +3849,7 @@
                 </a:solidFill>
                 <a:latin typeface="Nunito Sans"/>
               </a:rPr>
-              <a:t>Pregunta cerrada: «¿Es verdad?». Dylan: «Sí». No aprendo nada nuevo.</a:t>
+              <a:t>Pregunta cerrada: «¿Es verdad?». El chico: «Sí». No aprendo nada nuevo.</a:t>
             </a:r>
           </a:p>
           <a:p>
@@ -3874,7 +3874,7 @@
                 </a:solidFill>
                 <a:latin typeface="Nunito Sans"/>
               </a:rPr>
-              <a:t>Pregunta abierta: «¿Cómo lo sabes?». Dylan: «Me lo dijo uno de 4.º».</a:t>
+              <a:t>Pregunta abierta: «¿Cómo lo sabes?». El chico: «Me lo dijo uno de 4.º».</a:t>
             </a:r>
           </a:p>
           <a:p>
@@ -3899,7 +3899,7 @@
                 </a:solidFill>
                 <a:latin typeface="Nunito Sans"/>
               </a:rPr>
-              <a:t>Otra más: «¿Y cómo lo sabe él?». Dylan: «Ni idea».</a:t>
+              <a:t>Otra más: «¿Y cómo lo sabe él?». El chico: «Ni idea».</a:t>
             </a:r>
           </a:p>
           <a:p>
@@ -4419,7 +4419,7 @@
                 </a:solidFill>
                 <a:latin typeface="Nunito Sans"/>
               </a:rPr>
-              <a:t>«¿Por qué los de 1.º son tan pesados?»</a:t>
+              <a:t>«¿Por qué los hermanos pequeños son tan pesados?»</a:t>
             </a:r>
           </a:p>
         </p:txBody>
@@ -4517,7 +4517,7 @@
                 </a:solidFill>
                 <a:latin typeface="Nunito Sans"/>
               </a:rPr>
-              <a:t>Pero ya da por hecho algo: que los de 1.º son pesados.</a:t>
+              <a:t>Pero ya da por hecho algo: que los hermanos pequeños son pesados.</a:t>
             </a:r>
           </a:p>
           <a:p>
@@ -7152,7 +7152,7 @@
                 </a:solidFill>
                 <a:latin typeface="Nunito Sans"/>
               </a:rPr>
-              <a:t>Leire vuelve de la excursión. Su madre le pregunta: «¿Bien?». Leire: «Sí». Su padre le pregunta: «¿Qué es lo que más te ha gustado?».</a:t>
+              <a:t>Una chica vuelve de la excursión. Su madre le pregunta: «¿Bien?». La chica: «Sí». Su padre le pregunta: «¿Qué es lo que más te ha gustado?».</a:t>
             </a:r>
           </a:p>
         </p:txBody>
